--- a/it-talks.pptx
+++ b/it-talks.pptx
@@ -16915,8 +16915,8 @@
         </p:nvSpPr>
         <p:spPr>
           <a:xfrm>
-            <a:off x="54610" y="480060"/>
-            <a:ext cx="12191365" cy="6378575"/>
+            <a:off x="54610" y="609600"/>
+            <a:ext cx="12191365" cy="5903595"/>
           </a:xfrm>
         </p:spPr>
         <p:txBody>
@@ -17037,23 +17037,85 @@
             <a:pPr lvl="1"/>
             <a:r>
               <a:rPr lang="zh-CN" altLang="en-US" sz="2265"/>
-              <a:t>程序的编译：编译原理的完整流程；编译器的整体结构；单独介绍自然语言处理</a:t>
-            </a:r>
-            <a:endParaRPr lang="zh-CN" altLang="en-US" sz="2265"/>
-          </a:p>
-          <a:p>
-            <a:pPr lvl="1"/>
+              <a:t>程序的编译链接：编译原理的完整流程；编译器的整体结构；</a:t>
+            </a:r>
             <a:r>
               <a:rPr lang="zh-CN" altLang="en-US" sz="2265">
                 <a:sym typeface="+mn-ea"/>
               </a:rPr>
-              <a:t>程序的链接：</a:t>
-            </a:r>
+              <a:t>可执行文件格式，链接原理</a:t>
+            </a:r>
+            <a:endParaRPr lang="zh-CN" altLang="en-US" sz="2265">
+              <a:sym typeface="+mn-ea"/>
+            </a:endParaRPr>
+          </a:p>
+          <a:p>
+            <a:pPr lvl="1"/>
             <a:r>
               <a:rPr lang="zh-CN" altLang="en-US" sz="2265">
                 <a:sym typeface="+mn-ea"/>
               </a:rPr>
-              <a:t>可执行文件格式，链接原理</a:t>
+              <a:t>程序的加载运行：启动运行过程</a:t>
+            </a:r>
+            <a:r>
+              <a:rPr lang="en-US" altLang="zh-CN" sz="2265">
+                <a:sym typeface="+mn-ea"/>
+              </a:rPr>
+              <a:t>/</a:t>
+            </a:r>
+            <a:r>
+              <a:rPr lang="zh-CN" altLang="en-US" sz="2265">
+                <a:sym typeface="+mn-ea"/>
+              </a:rPr>
+              <a:t>库递归加载</a:t>
+            </a:r>
+            <a:r>
+              <a:rPr lang="en-US" altLang="zh-CN" sz="2265">
+                <a:sym typeface="+mn-ea"/>
+              </a:rPr>
+              <a:t>/</a:t>
+            </a:r>
+            <a:r>
+              <a:rPr lang="zh-CN" altLang="en-US" sz="2265">
+                <a:sym typeface="+mn-ea"/>
+              </a:rPr>
+              <a:t>运行状态</a:t>
+            </a:r>
+            <a:r>
+              <a:rPr lang="en-US" altLang="zh-CN" sz="2265">
+                <a:sym typeface="+mn-ea"/>
+              </a:rPr>
+              <a:t>/</a:t>
+            </a:r>
+            <a:r>
+              <a:rPr lang="zh-CN" altLang="en-US" sz="2265">
+                <a:sym typeface="+mn-ea"/>
+              </a:rPr>
+              <a:t>资源分布</a:t>
+            </a:r>
+            <a:r>
+              <a:rPr lang="en-US" altLang="zh-CN" sz="2265">
+                <a:sym typeface="+mn-ea"/>
+              </a:rPr>
+              <a:t>/</a:t>
+            </a:r>
+            <a:r>
+              <a:rPr lang="zh-CN" altLang="en-US" sz="2265">
+                <a:sym typeface="+mn-ea"/>
+              </a:rPr>
+              <a:t>动态加载</a:t>
+            </a:r>
+            <a:r>
+              <a:rPr lang="en-US" altLang="zh-CN" sz="2265">
+                <a:sym typeface="+mn-ea"/>
+              </a:rPr>
+              <a:t>/</a:t>
+            </a:r>
+            <a:r>
+              <a:rPr lang="zh-CN" altLang="en-US" sz="2265">
+                <a:sym typeface="+mn-ea"/>
+              </a:rPr>
+              <a:t>启动线程进程</a:t>
             </a:r>
             <a:endParaRPr lang="zh-CN" altLang="en-US" sz="2265">
               <a:sym typeface="+mn-ea"/>
@@ -17062,36 +17124,12 @@
           <a:p>
             <a:pPr lvl="1"/>
             <a:r>
-              <a:rPr lang="zh-CN" altLang="en-US" sz="2265">
-                <a:sym typeface="+mn-ea"/>
-              </a:rPr>
-              <a:t>程序的加载：启动运行的过程，各类库递归加载的原理。</a:t>
-            </a:r>
-            <a:endParaRPr lang="zh-CN" altLang="en-US" sz="2265">
-              <a:sym typeface="+mn-ea"/>
-            </a:endParaRPr>
-          </a:p>
-          <a:p>
-            <a:pPr lvl="1"/>
-            <a:r>
-              <a:rPr lang="zh-CN" altLang="en-US" sz="2265">
-                <a:sym typeface="+mn-ea"/>
-              </a:rPr>
-              <a:t>程序的运行：运行时的状态和各类资源分布，动态加载，启动线程进程等</a:t>
-            </a:r>
-            <a:endParaRPr lang="zh-CN" altLang="en-US" sz="2265">
-              <a:sym typeface="+mn-ea"/>
-            </a:endParaRPr>
-          </a:p>
-          <a:p>
-            <a:pPr lvl="1"/>
-            <a:r>
               <a:rPr lang="zh-CN" altLang="en-US" sz="2265"/>
-              <a:t>程序的解释：模拟原理，</a:t>
+              <a:t>程序的解释模拟：模拟原理</a:t>
             </a:r>
             <a:r>
               <a:rPr lang="en-US" altLang="zh-CN" sz="2265"/>
-              <a:t>Java/Python/QEMU/Mesa，Qemu环境模拟，J/P区别</a:t>
+              <a:t>(Java/Python/QEMU/Mesa)/Qemu环境模拟/(J/P区别</a:t>
             </a:r>
             <a:r>
               <a:rPr lang="zh-CN" altLang="en-US" sz="2265"/>
@@ -17099,7 +17137,7 @@
             </a:r>
             <a:r>
               <a:rPr lang="en-US" altLang="zh-CN" sz="2265"/>
-              <a:t>j/pni</a:t>
+              <a:t>j/pni)/AI</a:t>
             </a:r>
             <a:endParaRPr lang="zh-CN" altLang="en-US" sz="2265"/>
           </a:p>
